--- a/examples/figures/buoy_figs.pptx
+++ b/examples/figures/buoy_figs.pptx
@@ -104,6 +104,11 @@
       </a:defRPr>
     </a:lvl9pPr>
   </p:defaultTextStyle>
+  <p:extLst>
+    <p:ext uri="{EFAFB233-063F-42B5-8137-9DF3F51BA10A}">
+      <p15:sldGuideLst xmlns:p15="http://schemas.microsoft.com/office/powerpoint/2012/main"/>
+    </p:ext>
+  </p:extLst>
 </p:presentation>
 </file>
 
@@ -254,7 +259,7 @@
           <a:p>
             <a:fld id="{C72C0E32-8B5F-44E0-AC5A-962A6753DD5E}" type="datetimeFigureOut">
               <a:rPr lang="en-US" smtClean="0"/>
-              <a:t>7/30/2026</a:t>
+              <a:t>8/13/2026</a:t>
             </a:fld>
             <a:endParaRPr lang="en-US"/>
           </a:p>
@@ -452,7 +457,7 @@
           <a:p>
             <a:fld id="{C72C0E32-8B5F-44E0-AC5A-962A6753DD5E}" type="datetimeFigureOut">
               <a:rPr lang="en-US" smtClean="0"/>
-              <a:t>7/30/2026</a:t>
+              <a:t>8/13/2026</a:t>
             </a:fld>
             <a:endParaRPr lang="en-US"/>
           </a:p>
@@ -660,7 +665,7 @@
           <a:p>
             <a:fld id="{C72C0E32-8B5F-44E0-AC5A-962A6753DD5E}" type="datetimeFigureOut">
               <a:rPr lang="en-US" smtClean="0"/>
-              <a:t>7/30/2026</a:t>
+              <a:t>8/13/2026</a:t>
             </a:fld>
             <a:endParaRPr lang="en-US"/>
           </a:p>
@@ -858,7 +863,7 @@
           <a:p>
             <a:fld id="{C72C0E32-8B5F-44E0-AC5A-962A6753DD5E}" type="datetimeFigureOut">
               <a:rPr lang="en-US" smtClean="0"/>
-              <a:t>7/30/2026</a:t>
+              <a:t>8/13/2026</a:t>
             </a:fld>
             <a:endParaRPr lang="en-US"/>
           </a:p>
@@ -1133,7 +1138,7 @@
           <a:p>
             <a:fld id="{C72C0E32-8B5F-44E0-AC5A-962A6753DD5E}" type="datetimeFigureOut">
               <a:rPr lang="en-US" smtClean="0"/>
-              <a:t>7/30/2026</a:t>
+              <a:t>8/13/2026</a:t>
             </a:fld>
             <a:endParaRPr lang="en-US"/>
           </a:p>
@@ -1398,7 +1403,7 @@
           <a:p>
             <a:fld id="{C72C0E32-8B5F-44E0-AC5A-962A6753DD5E}" type="datetimeFigureOut">
               <a:rPr lang="en-US" smtClean="0"/>
-              <a:t>7/30/2026</a:t>
+              <a:t>8/13/2026</a:t>
             </a:fld>
             <a:endParaRPr lang="en-US"/>
           </a:p>
@@ -1810,7 +1815,7 @@
           <a:p>
             <a:fld id="{C72C0E32-8B5F-44E0-AC5A-962A6753DD5E}" type="datetimeFigureOut">
               <a:rPr lang="en-US" smtClean="0"/>
-              <a:t>7/30/2026</a:t>
+              <a:t>8/13/2026</a:t>
             </a:fld>
             <a:endParaRPr lang="en-US"/>
           </a:p>
@@ -1951,7 +1956,7 @@
           <a:p>
             <a:fld id="{C72C0E32-8B5F-44E0-AC5A-962A6753DD5E}" type="datetimeFigureOut">
               <a:rPr lang="en-US" smtClean="0"/>
-              <a:t>7/30/2026</a:t>
+              <a:t>8/13/2026</a:t>
             </a:fld>
             <a:endParaRPr lang="en-US"/>
           </a:p>
@@ -2064,7 +2069,7 @@
           <a:p>
             <a:fld id="{C72C0E32-8B5F-44E0-AC5A-962A6753DD5E}" type="datetimeFigureOut">
               <a:rPr lang="en-US" smtClean="0"/>
-              <a:t>7/30/2026</a:t>
+              <a:t>8/13/2026</a:t>
             </a:fld>
             <a:endParaRPr lang="en-US"/>
           </a:p>
@@ -2375,7 +2380,7 @@
           <a:p>
             <a:fld id="{C72C0E32-8B5F-44E0-AC5A-962A6753DD5E}" type="datetimeFigureOut">
               <a:rPr lang="en-US" smtClean="0"/>
-              <a:t>7/30/2026</a:t>
+              <a:t>8/13/2026</a:t>
             </a:fld>
             <a:endParaRPr lang="en-US"/>
           </a:p>
@@ -2663,7 +2668,7 @@
           <a:p>
             <a:fld id="{C72C0E32-8B5F-44E0-AC5A-962A6753DD5E}" type="datetimeFigureOut">
               <a:rPr lang="en-US" smtClean="0"/>
-              <a:t>7/30/2026</a:t>
+              <a:t>8/13/2026</a:t>
             </a:fld>
             <a:endParaRPr lang="en-US"/>
           </a:p>
@@ -2904,7 +2909,7 @@
           <a:p>
             <a:fld id="{C72C0E32-8B5F-44E0-AC5A-962A6753DD5E}" type="datetimeFigureOut">
               <a:rPr lang="en-US" smtClean="0"/>
-              <a:t>7/30/2026</a:t>
+              <a:t>8/13/2026</a:t>
             </a:fld>
             <a:endParaRPr lang="en-US"/>
           </a:p>
@@ -3323,10 +3328,10 @@
       </p:grpSpPr>
       <p:grpSp>
         <p:nvGrpSpPr>
-          <p:cNvPr id="59" name="Group 58">
-            <a:extLst>
-              <a:ext uri="{FF2B5EF4-FFF2-40B4-BE49-F238E27FC236}">
-                <a16:creationId xmlns:a16="http://schemas.microsoft.com/office/drawing/2014/main" id="{A9527C32-083F-7875-119D-E43EA45885AC}"/>
+          <p:cNvPr id="2" name="Group 1">
+            <a:extLst>
+              <a:ext uri="{FF2B5EF4-FFF2-40B4-BE49-F238E27FC236}">
+                <a16:creationId xmlns:a16="http://schemas.microsoft.com/office/drawing/2014/main" id="{8BB49621-FDD7-E21A-60F0-BBCB7A7ADA44}"/>
               </a:ext>
             </a:extLst>
           </p:cNvPr>
@@ -3335,67 +3340,18 @@
         </p:nvGrpSpPr>
         <p:grpSpPr>
           <a:xfrm>
-            <a:off x="1421176" y="2104222"/>
-            <a:ext cx="3214041" cy="3296797"/>
-            <a:chOff x="1421176" y="2104222"/>
-            <a:chExt cx="3214041" cy="3296797"/>
+            <a:off x="1798862" y="1906259"/>
+            <a:ext cx="3525268" cy="3660942"/>
+            <a:chOff x="1109949" y="1740077"/>
+            <a:chExt cx="3525268" cy="3660942"/>
           </a:xfrm>
         </p:grpSpPr>
-        <p:sp>
-          <p:nvSpPr>
-            <p:cNvPr id="5" name="Oval 4">
+        <p:pic>
+          <p:nvPicPr>
+            <p:cNvPr id="1026" name="Picture 2" descr="Compass directions icon set north, south, east, and west direction icons, .  45903616 Vector Art at Vecteezy">
               <a:extLst>
                 <a:ext uri="{FF2B5EF4-FFF2-40B4-BE49-F238E27FC236}">
-                  <a16:creationId xmlns:a16="http://schemas.microsoft.com/office/drawing/2014/main" id="{B10F5F57-632A-3495-7234-F756CA705A97}"/>
-                </a:ext>
-              </a:extLst>
-            </p:cNvPr>
-            <p:cNvSpPr/>
-            <p:nvPr/>
-          </p:nvSpPr>
-          <p:spPr>
-            <a:xfrm>
-              <a:off x="1421176" y="2104222"/>
-              <a:ext cx="3214041" cy="3296797"/>
-            </a:xfrm>
-            <a:prstGeom prst="ellipse">
-              <a:avLst/>
-            </a:prstGeom>
-            <a:solidFill>
-              <a:srgbClr val="E3DE00"/>
-            </a:solidFill>
-          </p:spPr>
-          <p:style>
-            <a:lnRef idx="2">
-              <a:schemeClr val="accent1">
-                <a:shade val="15000"/>
-              </a:schemeClr>
-            </a:lnRef>
-            <a:fillRef idx="1">
-              <a:schemeClr val="accent1"/>
-            </a:fillRef>
-            <a:effectRef idx="0">
-              <a:schemeClr val="accent1"/>
-            </a:effectRef>
-            <a:fontRef idx="minor">
-              <a:schemeClr val="lt1"/>
-            </a:fontRef>
-          </p:style>
-          <p:txBody>
-            <a:bodyPr rtlCol="0" anchor="ctr"/>
-            <a:lstStyle/>
-            <a:p>
-              <a:pPr algn="ctr"/>
-              <a:endParaRPr lang="en-US"/>
-            </a:p>
-          </p:txBody>
-        </p:sp>
-        <p:pic>
-          <p:nvPicPr>
-            <p:cNvPr id="13" name="Picture 2" descr="Crystalline Silicon Photovoltaics Research | Department of Energy">
-              <a:extLst>
-                <a:ext uri="{FF2B5EF4-FFF2-40B4-BE49-F238E27FC236}">
-                  <a16:creationId xmlns:a16="http://schemas.microsoft.com/office/drawing/2014/main" id="{D10EDBDC-1129-B68A-AFF0-E1E7EC42B6FD}"/>
+                  <a16:creationId xmlns:a16="http://schemas.microsoft.com/office/drawing/2014/main" id="{F5242211-98EC-BF4B-08F4-E6EF3B15E427}"/>
                 </a:ext>
               </a:extLst>
             </p:cNvPr>
@@ -3412,15 +3368,15 @@
                 </a:ext>
               </a:extLst>
             </a:blip>
-            <a:srcRect l="4228" t="10079" r="3054" b="8752"/>
+            <a:srcRect l="21422" t="6698" r="18931" b="5877"/>
             <a:stretch>
               <a:fillRect/>
             </a:stretch>
           </p:blipFill>
           <p:spPr bwMode="auto">
             <a:xfrm>
-              <a:off x="2329344" y="4527962"/>
-              <a:ext cx="1397700" cy="625731"/>
+              <a:off x="1109949" y="1740077"/>
+              <a:ext cx="1032046" cy="1008449"/>
             </a:xfrm>
             <a:prstGeom prst="rect">
               <a:avLst/>
@@ -3437,353 +3393,12 @@
             </a:extLst>
           </p:spPr>
         </p:pic>
-        <p:sp>
-          <p:nvSpPr>
-            <p:cNvPr id="14" name="Rectangle 13">
+        <p:grpSp>
+          <p:nvGrpSpPr>
+            <p:cNvPr id="59" name="Group 58">
               <a:extLst>
                 <a:ext uri="{FF2B5EF4-FFF2-40B4-BE49-F238E27FC236}">
-                  <a16:creationId xmlns:a16="http://schemas.microsoft.com/office/drawing/2014/main" id="{099DFD25-4E2D-AE27-1617-47B23957CE73}"/>
-                </a:ext>
-              </a:extLst>
-            </p:cNvPr>
-            <p:cNvSpPr/>
-            <p:nvPr/>
-          </p:nvSpPr>
-          <p:spPr>
-            <a:xfrm>
-              <a:off x="1830767" y="2748526"/>
-              <a:ext cx="2394857" cy="2008188"/>
-            </a:xfrm>
-            <a:prstGeom prst="rect">
-              <a:avLst/>
-            </a:prstGeom>
-            <a:solidFill>
-              <a:schemeClr val="bg2">
-                <a:alpha val="80000"/>
-              </a:schemeClr>
-            </a:solidFill>
-          </p:spPr>
-          <p:style>
-            <a:lnRef idx="2">
-              <a:schemeClr val="accent1">
-                <a:shade val="15000"/>
-              </a:schemeClr>
-            </a:lnRef>
-            <a:fillRef idx="1">
-              <a:schemeClr val="accent1"/>
-            </a:fillRef>
-            <a:effectRef idx="0">
-              <a:schemeClr val="accent1"/>
-            </a:effectRef>
-            <a:fontRef idx="minor">
-              <a:schemeClr val="lt1"/>
-            </a:fontRef>
-          </p:style>
-          <p:txBody>
-            <a:bodyPr rtlCol="0" anchor="ctr"/>
-            <a:lstStyle/>
-            <a:p>
-              <a:pPr algn="ctr"/>
-              <a:r>
-                <a:rPr lang="en-US" dirty="0">
-                  <a:solidFill>
-                    <a:schemeClr val="tx1"/>
-                  </a:solidFill>
-                </a:rPr>
-                <a:t>Obstacle</a:t>
-              </a:r>
-            </a:p>
-          </p:txBody>
-        </p:sp>
-        <p:cxnSp>
-          <p:nvCxnSpPr>
-            <p:cNvPr id="21" name="Straight Connector 20">
-              <a:extLst>
-                <a:ext uri="{FF2B5EF4-FFF2-40B4-BE49-F238E27FC236}">
-                  <a16:creationId xmlns:a16="http://schemas.microsoft.com/office/drawing/2014/main" id="{50E17AE2-A348-3D42-81AF-69F15A18C595}"/>
-                </a:ext>
-              </a:extLst>
-            </p:cNvPr>
-            <p:cNvCxnSpPr>
-              <a:cxnSpLocks/>
-            </p:cNvCxnSpPr>
-            <p:nvPr/>
-          </p:nvCxnSpPr>
-          <p:spPr>
-            <a:xfrm>
-              <a:off x="3028194" y="2505843"/>
-              <a:ext cx="0" cy="1293703"/>
-            </a:xfrm>
-            <a:prstGeom prst="line">
-              <a:avLst/>
-            </a:prstGeom>
-            <a:ln>
-              <a:solidFill>
-                <a:schemeClr val="tx1"/>
-              </a:solidFill>
-              <a:prstDash val="dash"/>
-            </a:ln>
-          </p:spPr>
-          <p:style>
-            <a:lnRef idx="2">
-              <a:schemeClr val="accent1"/>
-            </a:lnRef>
-            <a:fillRef idx="0">
-              <a:schemeClr val="accent1"/>
-            </a:fillRef>
-            <a:effectRef idx="1">
-              <a:schemeClr val="accent1"/>
-            </a:effectRef>
-            <a:fontRef idx="minor">
-              <a:schemeClr val="tx1"/>
-            </a:fontRef>
-          </p:style>
-        </p:cxnSp>
-        <p:sp>
-          <p:nvSpPr>
-            <p:cNvPr id="28" name="Arc 27">
-              <a:extLst>
-                <a:ext uri="{FF2B5EF4-FFF2-40B4-BE49-F238E27FC236}">
-                  <a16:creationId xmlns:a16="http://schemas.microsoft.com/office/drawing/2014/main" id="{15D2DC48-7980-A3DF-FAD6-7F00DBD3AB8D}"/>
-                </a:ext>
-              </a:extLst>
-            </p:cNvPr>
-            <p:cNvSpPr/>
-            <p:nvPr/>
-          </p:nvSpPr>
-          <p:spPr>
-            <a:xfrm>
-              <a:off x="2252498" y="2997546"/>
-              <a:ext cx="1551393" cy="1530417"/>
-            </a:xfrm>
-            <a:prstGeom prst="arc">
-              <a:avLst>
-                <a:gd name="adj1" fmla="val 16200000"/>
-                <a:gd name="adj2" fmla="val 5423251"/>
-              </a:avLst>
-            </a:prstGeom>
-            <a:ln>
-              <a:solidFill>
-                <a:schemeClr val="tx1"/>
-              </a:solidFill>
-              <a:prstDash val="dash"/>
-              <a:tailEnd type="triangle"/>
-            </a:ln>
-          </p:spPr>
-          <p:style>
-            <a:lnRef idx="2">
-              <a:schemeClr val="accent1"/>
-            </a:lnRef>
-            <a:fillRef idx="0">
-              <a:schemeClr val="accent1"/>
-            </a:fillRef>
-            <a:effectRef idx="1">
-              <a:schemeClr val="accent1"/>
-            </a:effectRef>
-            <a:fontRef idx="minor">
-              <a:schemeClr val="tx1"/>
-            </a:fontRef>
-          </p:style>
-          <p:txBody>
-            <a:bodyPr rtlCol="0" anchor="ctr"/>
-            <a:lstStyle/>
-            <a:p>
-              <a:pPr algn="ctr"/>
-              <a:endParaRPr lang="en-US"/>
-            </a:p>
-          </p:txBody>
-        </p:sp>
-        <mc:AlternateContent xmlns:mc="http://schemas.openxmlformats.org/markup-compatibility/2006">
-          <mc:Choice xmlns:a14="http://schemas.microsoft.com/office/drawing/2010/main" Requires="a14">
-            <p:sp>
-              <p:nvSpPr>
-                <p:cNvPr id="29" name="TextBox 28">
-                  <a:extLst>
-                    <a:ext uri="{FF2B5EF4-FFF2-40B4-BE49-F238E27FC236}">
-                      <a16:creationId xmlns:a16="http://schemas.microsoft.com/office/drawing/2014/main" id="{F54B93E1-66B5-32D1-1C6A-EFDDE6CF2C95}"/>
-                    </a:ext>
-                  </a:extLst>
-                </p:cNvPr>
-                <p:cNvSpPr txBox="1"/>
-                <p:nvPr/>
-              </p:nvSpPr>
-              <p:spPr>
-                <a:xfrm>
-                  <a:off x="3673061" y="3614880"/>
-                  <a:ext cx="683394" cy="369332"/>
-                </a:xfrm>
-                <a:prstGeom prst="rect">
-                  <a:avLst/>
-                </a:prstGeom>
-                <a:noFill/>
-              </p:spPr>
-              <p:txBody>
-                <a:bodyPr wrap="square" rtlCol="0">
-                  <a:spAutoFit/>
-                </a:bodyPr>
-                <a:lstStyle/>
-                <a:p>
-                  <a14:m>
-                    <m:oMathPara xmlns:m="http://schemas.openxmlformats.org/officeDocument/2006/math">
-                      <m:oMathParaPr>
-                        <m:jc m:val="centerGroup"/>
-                      </m:oMathParaPr>
-                      <m:oMath xmlns:m="http://schemas.openxmlformats.org/officeDocument/2006/math">
-                        <m:sSub>
-                          <m:sSubPr>
-                            <m:ctrlPr>
-                              <a:rPr lang="en-US" b="0" i="1" smtClean="0">
-                                <a:latin typeface="Cambria Math" panose="02040503050406030204" pitchFamily="18" charset="0"/>
-                              </a:rPr>
-                            </m:ctrlPr>
-                          </m:sSubPr>
-                          <m:e>
-                            <m:r>
-                              <a:rPr lang="en-US" b="0" i="1" smtClean="0">
-                                <a:latin typeface="Cambria Math" panose="02040503050406030204" pitchFamily="18" charset="0"/>
-                              </a:rPr>
-                              <m:t>𝜃</m:t>
-                            </m:r>
-                          </m:e>
-                          <m:sub>
-                            <m:r>
-                              <a:rPr lang="en-US" b="0" i="1" smtClean="0">
-                                <a:latin typeface="Cambria Math" panose="02040503050406030204" pitchFamily="18" charset="0"/>
-                              </a:rPr>
-                              <m:t>𝐴</m:t>
-                            </m:r>
-                            <m:r>
-                              <a:rPr lang="en-US" b="0" i="1" smtClean="0">
-                                <a:latin typeface="Cambria Math" panose="02040503050406030204" pitchFamily="18" charset="0"/>
-                              </a:rPr>
-                              <m:t>0</m:t>
-                            </m:r>
-                          </m:sub>
-                        </m:sSub>
-                      </m:oMath>
-                    </m:oMathPara>
-                  </a14:m>
-                  <a:endParaRPr lang="en-US" dirty="0"/>
-                </a:p>
-              </p:txBody>
-            </p:sp>
-          </mc:Choice>
-          <mc:Fallback>
-            <p:sp>
-              <p:nvSpPr>
-                <p:cNvPr id="29" name="TextBox 28">
-                  <a:extLst>
-                    <a:ext uri="{FF2B5EF4-FFF2-40B4-BE49-F238E27FC236}">
-                      <a16:creationId xmlns:a16="http://schemas.microsoft.com/office/drawing/2014/main" id="{F54B93E1-66B5-32D1-1C6A-EFDDE6CF2C95}"/>
-                    </a:ext>
-                  </a:extLst>
-                </p:cNvPr>
-                <p:cNvSpPr txBox="1">
-                  <a:spLocks noRot="1" noChangeAspect="1" noMove="1" noResize="1" noEditPoints="1" noAdjustHandles="1" noChangeArrowheads="1" noChangeShapeType="1" noTextEdit="1"/>
-                </p:cNvSpPr>
-                <p:nvPr/>
-              </p:nvSpPr>
-              <p:spPr>
-                <a:xfrm>
-                  <a:off x="3673061" y="3614880"/>
-                  <a:ext cx="683394" cy="369332"/>
-                </a:xfrm>
-                <a:prstGeom prst="rect">
-                  <a:avLst/>
-                </a:prstGeom>
-                <a:blipFill>
-                  <a:blip r:embed="rId3"/>
-                  <a:stretch>
-                    <a:fillRect/>
-                  </a:stretch>
-                </a:blipFill>
-              </p:spPr>
-              <p:txBody>
-                <a:bodyPr/>
-                <a:lstStyle/>
-                <a:p>
-                  <a:r>
-                    <a:rPr lang="en-US">
-                      <a:noFill/>
-                    </a:rPr>
-                    <a:t> </a:t>
-                  </a:r>
-                </a:p>
-              </p:txBody>
-            </p:sp>
-          </mc:Fallback>
-        </mc:AlternateContent>
-        <p:cxnSp>
-          <p:nvCxnSpPr>
-            <p:cNvPr id="32" name="Straight Connector 31">
-              <a:extLst>
-                <a:ext uri="{FF2B5EF4-FFF2-40B4-BE49-F238E27FC236}">
-                  <a16:creationId xmlns:a16="http://schemas.microsoft.com/office/drawing/2014/main" id="{DBF9BD32-835D-19F9-8C74-518E353F28D8}"/>
-                </a:ext>
-              </a:extLst>
-            </p:cNvPr>
-            <p:cNvCxnSpPr>
-              <a:cxnSpLocks/>
-            </p:cNvCxnSpPr>
-            <p:nvPr/>
-          </p:nvCxnSpPr>
-          <p:spPr>
-            <a:xfrm>
-              <a:off x="3028194" y="3839852"/>
-              <a:ext cx="0" cy="1102737"/>
-            </a:xfrm>
-            <a:prstGeom prst="line">
-              <a:avLst/>
-            </a:prstGeom>
-            <a:ln>
-              <a:solidFill>
-                <a:schemeClr val="tx1"/>
-              </a:solidFill>
-              <a:prstDash val="dash"/>
-            </a:ln>
-          </p:spPr>
-          <p:style>
-            <a:lnRef idx="2">
-              <a:schemeClr val="accent1"/>
-            </a:lnRef>
-            <a:fillRef idx="0">
-              <a:schemeClr val="accent1"/>
-            </a:fillRef>
-            <a:effectRef idx="1">
-              <a:schemeClr val="accent1"/>
-            </a:effectRef>
-            <a:fontRef idx="minor">
-              <a:schemeClr val="tx1"/>
-            </a:fontRef>
-          </p:style>
-        </p:cxnSp>
-      </p:grpSp>
-      <p:grpSp>
-        <p:nvGrpSpPr>
-          <p:cNvPr id="63" name="Group 62">
-            <a:extLst>
-              <a:ext uri="{FF2B5EF4-FFF2-40B4-BE49-F238E27FC236}">
-                <a16:creationId xmlns:a16="http://schemas.microsoft.com/office/drawing/2014/main" id="{53441E60-C859-4E58-3808-DDBCDFC23AAF}"/>
-              </a:ext>
-            </a:extLst>
-          </p:cNvPr>
-          <p:cNvGrpSpPr/>
-          <p:nvPr/>
-        </p:nvGrpSpPr>
-        <p:grpSpPr>
-          <a:xfrm>
-            <a:off x="5324130" y="427892"/>
-            <a:ext cx="5927764" cy="5139308"/>
-            <a:chOff x="5324130" y="427892"/>
-            <a:chExt cx="5927764" cy="5139308"/>
-          </a:xfrm>
-        </p:grpSpPr>
-        <p:grpSp>
-          <p:nvGrpSpPr>
-            <p:cNvPr id="60" name="Group 59">
-              <a:extLst>
-                <a:ext uri="{FF2B5EF4-FFF2-40B4-BE49-F238E27FC236}">
-                  <a16:creationId xmlns:a16="http://schemas.microsoft.com/office/drawing/2014/main" id="{FC96FFCF-2FB3-8B18-191F-2F6760CE8332}"/>
+                  <a16:creationId xmlns:a16="http://schemas.microsoft.com/office/drawing/2014/main" id="{A9527C32-083F-7875-119D-E43EA45885AC}"/>
                 </a:ext>
               </a:extLst>
             </p:cNvPr>
@@ -3792,18 +3407,18 @@
           </p:nvGrpSpPr>
           <p:grpSpPr>
             <a:xfrm>
-              <a:off x="5324130" y="427892"/>
-              <a:ext cx="5229570" cy="5139308"/>
-              <a:chOff x="6067702" y="261711"/>
-              <a:chExt cx="5229570" cy="5139308"/>
+              <a:off x="1421176" y="2104222"/>
+              <a:ext cx="3214041" cy="3296797"/>
+              <a:chOff x="1421176" y="2104222"/>
+              <a:chExt cx="3214041" cy="3296797"/>
             </a:xfrm>
           </p:grpSpPr>
           <p:sp>
             <p:nvSpPr>
-              <p:cNvPr id="7" name="Rectangle 6">
+              <p:cNvPr id="5" name="Oval 4">
                 <a:extLst>
                   <a:ext uri="{FF2B5EF4-FFF2-40B4-BE49-F238E27FC236}">
-                    <a16:creationId xmlns:a16="http://schemas.microsoft.com/office/drawing/2014/main" id="{98FF38A9-3F26-2282-E6F1-342022E21C27}"/>
+                    <a16:creationId xmlns:a16="http://schemas.microsoft.com/office/drawing/2014/main" id="{B10F5F57-632A-3495-7234-F756CA705A97}"/>
                   </a:ext>
                 </a:extLst>
               </p:cNvPr>
@@ -3812,10 +3427,10 @@
             </p:nvSpPr>
             <p:spPr>
               <a:xfrm>
-                <a:off x="6621138" y="3742981"/>
-                <a:ext cx="3214042" cy="776689"/>
+                <a:off x="1421176" y="2104222"/>
+                <a:ext cx="3214041" cy="3296797"/>
               </a:xfrm>
-              <a:prstGeom prst="rect">
+              <a:prstGeom prst="ellipse">
                 <a:avLst/>
               </a:prstGeom>
               <a:solidFill>
@@ -3847,12 +3462,59 @@
               </a:p>
             </p:txBody>
           </p:sp>
+          <p:pic>
+            <p:nvPicPr>
+              <p:cNvPr id="13" name="Picture 2" descr="Crystalline Silicon Photovoltaics Research | Department of Energy">
+                <a:extLst>
+                  <a:ext uri="{FF2B5EF4-FFF2-40B4-BE49-F238E27FC236}">
+                    <a16:creationId xmlns:a16="http://schemas.microsoft.com/office/drawing/2014/main" id="{D10EDBDC-1129-B68A-AFF0-E1E7EC42B6FD}"/>
+                  </a:ext>
+                </a:extLst>
+              </p:cNvPr>
+              <p:cNvPicPr>
+                <a:picLocks noChangeAspect="1" noChangeArrowheads="1"/>
+              </p:cNvPicPr>
+              <p:nvPr/>
+            </p:nvPicPr>
+            <p:blipFill rotWithShape="1">
+              <a:blip r:embed="rId3">
+                <a:extLst>
+                  <a:ext uri="{28A0092B-C50C-407E-A947-70E740481C1C}">
+                    <a14:useLocalDpi xmlns:a14="http://schemas.microsoft.com/office/drawing/2010/main" val="0"/>
+                  </a:ext>
+                </a:extLst>
+              </a:blip>
+              <a:srcRect l="4228" t="10079" r="3054" b="8752"/>
+              <a:stretch>
+                <a:fillRect/>
+              </a:stretch>
+            </p:blipFill>
+            <p:spPr bwMode="auto">
+              <a:xfrm>
+                <a:off x="2329344" y="4527962"/>
+                <a:ext cx="1397700" cy="625731"/>
+              </a:xfrm>
+              <a:prstGeom prst="rect">
+                <a:avLst/>
+              </a:prstGeom>
+              <a:noFill/>
+              <a:extLst>
+                <a:ext uri="{909E8E84-426E-40DD-AFC4-6F175D3DCCD1}">
+                  <a14:hiddenFill xmlns:a14="http://schemas.microsoft.com/office/drawing/2010/main">
+                    <a:solidFill>
+                      <a:srgbClr val="FFFFFF"/>
+                    </a:solidFill>
+                  </a14:hiddenFill>
+                </a:ext>
+              </a:extLst>
+            </p:spPr>
+          </p:pic>
           <p:sp>
             <p:nvSpPr>
-              <p:cNvPr id="8" name="Rectangle 7">
+              <p:cNvPr id="14" name="Rectangle 13">
                 <a:extLst>
                   <a:ext uri="{FF2B5EF4-FFF2-40B4-BE49-F238E27FC236}">
-                    <a16:creationId xmlns:a16="http://schemas.microsoft.com/office/drawing/2014/main" id="{4B884B81-FB45-4483-7A28-84BDBDA7146F}"/>
+                    <a16:creationId xmlns:a16="http://schemas.microsoft.com/office/drawing/2014/main" id="{099DFD25-4E2D-AE27-1617-47B23957CE73}"/>
                   </a:ext>
                 </a:extLst>
               </p:cNvPr>
@@ -3861,140 +3523,7 @@
             </p:nvSpPr>
             <p:spPr>
               <a:xfrm>
-                <a:off x="6621138" y="4519670"/>
-                <a:ext cx="3214041" cy="370114"/>
-              </a:xfrm>
-              <a:prstGeom prst="rect">
-                <a:avLst/>
-              </a:prstGeom>
-            </p:spPr>
-            <p:style>
-              <a:lnRef idx="2">
-                <a:schemeClr val="accent1">
-                  <a:shade val="15000"/>
-                </a:schemeClr>
-              </a:lnRef>
-              <a:fillRef idx="1">
-                <a:schemeClr val="accent1"/>
-              </a:fillRef>
-              <a:effectRef idx="0">
-                <a:schemeClr val="accent1"/>
-              </a:effectRef>
-              <a:fontRef idx="minor">
-                <a:schemeClr val="lt1"/>
-              </a:fontRef>
-            </p:style>
-            <p:txBody>
-              <a:bodyPr rtlCol="0" anchor="ctr"/>
-              <a:lstStyle/>
-              <a:p>
-                <a:pPr algn="ctr"/>
-                <a:endParaRPr lang="en-US"/>
-              </a:p>
-            </p:txBody>
-          </p:sp>
-          <p:sp>
-            <p:nvSpPr>
-              <p:cNvPr id="9" name="Trapezoid 8">
-                <a:extLst>
-                  <a:ext uri="{FF2B5EF4-FFF2-40B4-BE49-F238E27FC236}">
-                    <a16:creationId xmlns:a16="http://schemas.microsoft.com/office/drawing/2014/main" id="{3BAE7987-6B19-4D9B-68C5-748E1E37500A}"/>
-                  </a:ext>
-                </a:extLst>
-              </p:cNvPr>
-              <p:cNvSpPr/>
-              <p:nvPr/>
-            </p:nvSpPr>
-            <p:spPr>
-              <a:xfrm rot="10800000">
-                <a:off x="6621137" y="4889783"/>
-                <a:ext cx="3214042" cy="511236"/>
-              </a:xfrm>
-              <a:prstGeom prst="trapezoid">
-                <a:avLst>
-                  <a:gd name="adj" fmla="val 72409"/>
-                </a:avLst>
-              </a:prstGeom>
-            </p:spPr>
-            <p:style>
-              <a:lnRef idx="2">
-                <a:schemeClr val="accent1">
-                  <a:shade val="15000"/>
-                </a:schemeClr>
-              </a:lnRef>
-              <a:fillRef idx="1">
-                <a:schemeClr val="accent1"/>
-              </a:fillRef>
-              <a:effectRef idx="0">
-                <a:schemeClr val="accent1"/>
-              </a:effectRef>
-              <a:fontRef idx="minor">
-                <a:schemeClr val="lt1"/>
-              </a:fontRef>
-            </p:style>
-            <p:txBody>
-              <a:bodyPr rtlCol="0" anchor="ctr"/>
-              <a:lstStyle/>
-              <a:p>
-                <a:pPr algn="ctr"/>
-                <a:endParaRPr lang="en-US"/>
-              </a:p>
-            </p:txBody>
-          </p:sp>
-          <p:cxnSp>
-            <p:nvCxnSpPr>
-              <p:cNvPr id="11" name="Straight Connector 10">
-                <a:extLst>
-                  <a:ext uri="{FF2B5EF4-FFF2-40B4-BE49-F238E27FC236}">
-                    <a16:creationId xmlns:a16="http://schemas.microsoft.com/office/drawing/2014/main" id="{3AC5E83D-D610-515D-ECAA-7AD2A4F95FD2}"/>
-                  </a:ext>
-                </a:extLst>
-              </p:cNvPr>
-              <p:cNvCxnSpPr>
-                <a:cxnSpLocks/>
-              </p:cNvCxnSpPr>
-              <p:nvPr/>
-            </p:nvCxnSpPr>
-            <p:spPr>
-              <a:xfrm>
-                <a:off x="6191872" y="4278086"/>
-                <a:ext cx="5105400" cy="0"/>
-              </a:xfrm>
-              <a:prstGeom prst="line">
-                <a:avLst/>
-              </a:prstGeom>
-              <a:ln w="57150"/>
-            </p:spPr>
-            <p:style>
-              <a:lnRef idx="2">
-                <a:schemeClr val="accent1"/>
-              </a:lnRef>
-              <a:fillRef idx="0">
-                <a:schemeClr val="accent1"/>
-              </a:fillRef>
-              <a:effectRef idx="1">
-                <a:schemeClr val="accent1"/>
-              </a:effectRef>
-              <a:fontRef idx="minor">
-                <a:schemeClr val="tx1"/>
-              </a:fontRef>
-            </p:style>
-          </p:cxnSp>
-          <p:sp>
-            <p:nvSpPr>
-              <p:cNvPr id="15" name="Rectangle 14">
-                <a:extLst>
-                  <a:ext uri="{FF2B5EF4-FFF2-40B4-BE49-F238E27FC236}">
-                    <a16:creationId xmlns:a16="http://schemas.microsoft.com/office/drawing/2014/main" id="{C6961707-1466-FFA6-53DF-EF3240D2F8EC}"/>
-                  </a:ext>
-                </a:extLst>
-              </p:cNvPr>
-              <p:cNvSpPr/>
-              <p:nvPr/>
-            </p:nvSpPr>
-            <p:spPr>
-              <a:xfrm>
-                <a:off x="7030729" y="261711"/>
+                <a:off x="1830767" y="2748526"/>
                 <a:ext cx="2394857" cy="2008188"/>
               </a:xfrm>
               <a:prstGeom prst="rect">
@@ -4038,59 +3567,12 @@
               </a:p>
             </p:txBody>
           </p:sp>
-          <p:pic>
-            <p:nvPicPr>
-              <p:cNvPr id="16" name="Picture 2" descr="Crystalline Silicon Photovoltaics Research | Department of Energy">
+          <p:cxnSp>
+            <p:nvCxnSpPr>
+              <p:cNvPr id="21" name="Straight Connector 20">
                 <a:extLst>
                   <a:ext uri="{FF2B5EF4-FFF2-40B4-BE49-F238E27FC236}">
-                    <a16:creationId xmlns:a16="http://schemas.microsoft.com/office/drawing/2014/main" id="{B7C6649C-3EF2-E536-D265-35687BA5461F}"/>
-                  </a:ext>
-                </a:extLst>
-              </p:cNvPr>
-              <p:cNvPicPr>
-                <a:picLocks noChangeAspect="1" noChangeArrowheads="1"/>
-              </p:cNvPicPr>
-              <p:nvPr/>
-            </p:nvPicPr>
-            <p:blipFill rotWithShape="1">
-              <a:blip r:embed="rId2">
-                <a:extLst>
-                  <a:ext uri="{28A0092B-C50C-407E-A947-70E740481C1C}">
-                    <a14:useLocalDpi xmlns:a14="http://schemas.microsoft.com/office/drawing/2010/main" val="0"/>
-                  </a:ext>
-                </a:extLst>
-              </a:blip>
-              <a:srcRect l="4228" t="10079" r="3054" b="8752"/>
-              <a:stretch>
-                <a:fillRect/>
-              </a:stretch>
-            </p:blipFill>
-            <p:spPr bwMode="auto">
-              <a:xfrm rot="3182710">
-                <a:off x="6950019" y="2996178"/>
-                <a:ext cx="401910" cy="787408"/>
-              </a:xfrm>
-              <a:prstGeom prst="rect">
-                <a:avLst/>
-              </a:prstGeom>
-              <a:noFill/>
-              <a:extLst>
-                <a:ext uri="{909E8E84-426E-40DD-AFC4-6F175D3DCCD1}">
-                  <a14:hiddenFill xmlns:a14="http://schemas.microsoft.com/office/drawing/2010/main">
-                    <a:solidFill>
-                      <a:srgbClr val="FFFFFF"/>
-                    </a:solidFill>
-                  </a14:hiddenFill>
-                </a:ext>
-              </a:extLst>
-            </p:spPr>
-          </p:pic>
-          <p:cxnSp>
-            <p:nvCxnSpPr>
-              <p:cNvPr id="30" name="Straight Connector 29">
-                <a:extLst>
-                  <a:ext uri="{FF2B5EF4-FFF2-40B4-BE49-F238E27FC236}">
-                    <a16:creationId xmlns:a16="http://schemas.microsoft.com/office/drawing/2014/main" id="{6AC0F82A-266A-697D-242D-BCC4B2F8F658}"/>
+                    <a16:creationId xmlns:a16="http://schemas.microsoft.com/office/drawing/2014/main" id="{50E17AE2-A348-3D42-81AF-69F15A18C595}"/>
                   </a:ext>
                 </a:extLst>
               </p:cNvPr>
@@ -4100,53 +3582,9 @@
               <p:nvPr/>
             </p:nvCxnSpPr>
             <p:spPr>
-              <a:xfrm flipH="1">
-                <a:off x="7030729" y="3252052"/>
-                <a:ext cx="636896" cy="484905"/>
-              </a:xfrm>
-              <a:prstGeom prst="line">
-                <a:avLst/>
-              </a:prstGeom>
-              <a:ln>
-                <a:solidFill>
-                  <a:schemeClr val="tx1"/>
-                </a:solidFill>
-                <a:prstDash val="dash"/>
-              </a:ln>
-            </p:spPr>
-            <p:style>
-              <a:lnRef idx="2">
-                <a:schemeClr val="accent1"/>
-              </a:lnRef>
-              <a:fillRef idx="0">
-                <a:schemeClr val="accent1"/>
-              </a:fillRef>
-              <a:effectRef idx="1">
-                <a:schemeClr val="accent1"/>
-              </a:effectRef>
-              <a:fontRef idx="minor">
-                <a:schemeClr val="tx1"/>
-              </a:fontRef>
-            </p:style>
-          </p:cxnSp>
-          <p:cxnSp>
-            <p:nvCxnSpPr>
-              <p:cNvPr id="45" name="Straight Connector 44">
-                <a:extLst>
-                  <a:ext uri="{FF2B5EF4-FFF2-40B4-BE49-F238E27FC236}">
-                    <a16:creationId xmlns:a16="http://schemas.microsoft.com/office/drawing/2014/main" id="{B6AC428F-622B-2AA5-8B8D-75A62A18014B}"/>
-                  </a:ext>
-                </a:extLst>
-              </p:cNvPr>
-              <p:cNvCxnSpPr>
-                <a:cxnSpLocks/>
-              </p:cNvCxnSpPr>
-              <p:nvPr/>
-            </p:nvCxnSpPr>
-            <p:spPr>
-              <a:xfrm flipH="1">
-                <a:off x="7030729" y="3736957"/>
-                <a:ext cx="703571" cy="0"/>
+              <a:xfrm>
+                <a:off x="3028194" y="2505843"/>
+                <a:ext cx="0" cy="1293703"/>
               </a:xfrm>
               <a:prstGeom prst="line">
                 <a:avLst/>
@@ -4175,10 +3613,10 @@
           </p:cxnSp>
           <p:sp>
             <p:nvSpPr>
-              <p:cNvPr id="48" name="Arc 47">
+              <p:cNvPr id="28" name="Arc 27">
                 <a:extLst>
                   <a:ext uri="{FF2B5EF4-FFF2-40B4-BE49-F238E27FC236}">
-                    <a16:creationId xmlns:a16="http://schemas.microsoft.com/office/drawing/2014/main" id="{166E5A87-2C19-561B-00A4-C1521A8A1DFD}"/>
+                    <a16:creationId xmlns:a16="http://schemas.microsoft.com/office/drawing/2014/main" id="{15D2DC48-7980-A3DF-FAD6-7F00DBD3AB8D}"/>
                   </a:ext>
                 </a:extLst>
               </p:cNvPr>
@@ -4186,14 +3624,14 @@
               <p:nvPr/>
             </p:nvSpPr>
             <p:spPr>
-              <a:xfrm flipV="1">
-                <a:off x="6067702" y="2909668"/>
-                <a:ext cx="1551393" cy="1481552"/>
+              <a:xfrm>
+                <a:off x="2252498" y="2997546"/>
+                <a:ext cx="1551393" cy="1530417"/>
               </a:xfrm>
               <a:prstGeom prst="arc">
                 <a:avLst>
-                  <a:gd name="adj1" fmla="val 21295703"/>
-                  <a:gd name="adj2" fmla="val 1337315"/>
+                  <a:gd name="adj1" fmla="val 16200000"/>
+                  <a:gd name="adj2" fmla="val 5423251"/>
                 </a:avLst>
               </a:prstGeom>
               <a:ln>
@@ -4227,14 +3665,14 @@
               </a:p>
             </p:txBody>
           </p:sp>
-          <mc:AlternateContent xmlns:mc="http://schemas.openxmlformats.org/markup-compatibility/2006">
-            <mc:Choice xmlns:a14="http://schemas.microsoft.com/office/drawing/2010/main" Requires="a14">
+          <mc:AlternateContent xmlns:mc="http://schemas.openxmlformats.org/markup-compatibility/2006" xmlns:a14="http://schemas.microsoft.com/office/drawing/2010/main">
+            <mc:Choice Requires="a14">
               <p:sp>
                 <p:nvSpPr>
-                  <p:cNvPr id="52" name="TextBox 51">
+                  <p:cNvPr id="29" name="TextBox 28">
                     <a:extLst>
                       <a:ext uri="{FF2B5EF4-FFF2-40B4-BE49-F238E27FC236}">
-                        <a16:creationId xmlns:a16="http://schemas.microsoft.com/office/drawing/2014/main" id="{B5FB2DA0-DE67-D95F-8C82-3633A8144AAD}"/>
+                        <a16:creationId xmlns:a16="http://schemas.microsoft.com/office/drawing/2014/main" id="{F54B93E1-66B5-32D1-1C6A-EFDDE6CF2C95}"/>
                       </a:ext>
                     </a:extLst>
                   </p:cNvPr>
@@ -4243,8 +3681,8 @@
                 </p:nvSpPr>
                 <p:spPr>
                   <a:xfrm>
-                    <a:off x="7586398" y="3326156"/>
-                    <a:ext cx="560005" cy="369332"/>
+                    <a:off x="3673061" y="3614880"/>
+                    <a:ext cx="683394" cy="369332"/>
                   </a:xfrm>
                   <a:prstGeom prst="rect">
                     <a:avLst/>
@@ -4257,6 +3695,7 @@
                   </a:bodyPr>
                   <a:lstStyle/>
                   <a:p>
+                    <a:pPr/>
                     <a14:m>
                       <m:oMathPara xmlns:m="http://schemas.openxmlformats.org/officeDocument/2006/math">
                         <m:oMathParaPr>
@@ -4284,7 +3723,7 @@
                                 <a:rPr lang="en-US" b="0" i="1" smtClean="0">
                                   <a:latin typeface="Cambria Math" panose="02040503050406030204" pitchFamily="18" charset="0"/>
                                 </a:rPr>
-                                <m:t>𝑇</m:t>
+                                <m:t>𝐴</m:t>
                               </m:r>
                               <m:r>
                                 <a:rPr lang="en-US" b="0" i="1" smtClean="0">
@@ -4302,13 +3741,13 @@
                 </p:txBody>
               </p:sp>
             </mc:Choice>
-            <mc:Fallback>
+            <mc:Fallback xmlns="">
               <p:sp>
                 <p:nvSpPr>
-                  <p:cNvPr id="52" name="TextBox 51">
+                  <p:cNvPr id="29" name="TextBox 28">
                     <a:extLst>
                       <a:ext uri="{FF2B5EF4-FFF2-40B4-BE49-F238E27FC236}">
-                        <a16:creationId xmlns:a16="http://schemas.microsoft.com/office/drawing/2014/main" id="{B5FB2DA0-DE67-D95F-8C82-3633A8144AAD}"/>
+                        <a16:creationId xmlns:a16="http://schemas.microsoft.com/office/drawing/2014/main" id="{F54B93E1-66B5-32D1-1C6A-EFDDE6CF2C95}"/>
                       </a:ext>
                     </a:extLst>
                   </p:cNvPr>
@@ -4319,8 +3758,8 @@
                 </p:nvSpPr>
                 <p:spPr>
                   <a:xfrm>
-                    <a:off x="7586398" y="3326156"/>
-                    <a:ext cx="560005" cy="369332"/>
+                    <a:off x="3673061" y="3614880"/>
+                    <a:ext cx="683394" cy="369332"/>
                   </a:xfrm>
                   <a:prstGeom prst="rect">
                     <a:avLst/>
@@ -4347,42 +3786,699 @@
               </p:sp>
             </mc:Fallback>
           </mc:AlternateContent>
+          <p:cxnSp>
+            <p:nvCxnSpPr>
+              <p:cNvPr id="32" name="Straight Connector 31">
+                <a:extLst>
+                  <a:ext uri="{FF2B5EF4-FFF2-40B4-BE49-F238E27FC236}">
+                    <a16:creationId xmlns:a16="http://schemas.microsoft.com/office/drawing/2014/main" id="{DBF9BD32-835D-19F9-8C74-518E353F28D8}"/>
+                  </a:ext>
+                </a:extLst>
+              </p:cNvPr>
+              <p:cNvCxnSpPr>
+                <a:cxnSpLocks/>
+              </p:cNvCxnSpPr>
+              <p:nvPr/>
+            </p:nvCxnSpPr>
+            <p:spPr>
+              <a:xfrm>
+                <a:off x="3028194" y="3839852"/>
+                <a:ext cx="0" cy="1102737"/>
+              </a:xfrm>
+              <a:prstGeom prst="line">
+                <a:avLst/>
+              </a:prstGeom>
+              <a:ln>
+                <a:solidFill>
+                  <a:schemeClr val="tx1"/>
+                </a:solidFill>
+                <a:prstDash val="dash"/>
+              </a:ln>
+            </p:spPr>
+            <p:style>
+              <a:lnRef idx="2">
+                <a:schemeClr val="accent1"/>
+              </a:lnRef>
+              <a:fillRef idx="0">
+                <a:schemeClr val="accent1"/>
+              </a:fillRef>
+              <a:effectRef idx="1">
+                <a:schemeClr val="accent1"/>
+              </a:effectRef>
+              <a:fontRef idx="minor">
+                <a:schemeClr val="tx1"/>
+              </a:fontRef>
+            </p:style>
+          </p:cxnSp>
         </p:grpSp>
-        <p:sp>
-          <p:nvSpPr>
-            <p:cNvPr id="61" name="TextBox 60">
+      </p:grpSp>
+      <p:grpSp>
+        <p:nvGrpSpPr>
+          <p:cNvPr id="6" name="Group 5">
+            <a:extLst>
+              <a:ext uri="{FF2B5EF4-FFF2-40B4-BE49-F238E27FC236}">
+                <a16:creationId xmlns:a16="http://schemas.microsoft.com/office/drawing/2014/main" id="{E56D8EB5-28B2-BD00-FD08-7E7CBB42CC51}"/>
+              </a:ext>
+            </a:extLst>
+          </p:cNvPr>
+          <p:cNvGrpSpPr/>
+          <p:nvPr/>
+        </p:nvGrpSpPr>
+        <p:grpSpPr>
+          <a:xfrm>
+            <a:off x="5324130" y="623304"/>
+            <a:ext cx="4513933" cy="4943896"/>
+            <a:chOff x="5324130" y="623304"/>
+            <a:chExt cx="4513933" cy="4943896"/>
+          </a:xfrm>
+        </p:grpSpPr>
+        <p:grpSp>
+          <p:nvGrpSpPr>
+            <p:cNvPr id="63" name="Group 62">
               <a:extLst>
                 <a:ext uri="{FF2B5EF4-FFF2-40B4-BE49-F238E27FC236}">
-                  <a16:creationId xmlns:a16="http://schemas.microsoft.com/office/drawing/2014/main" id="{0BE245F1-48B7-7DF8-547B-CF3B3E963A9C}"/>
+                  <a16:creationId xmlns:a16="http://schemas.microsoft.com/office/drawing/2014/main" id="{53441E60-C859-4E58-3808-DDBCDFC23AAF}"/>
                 </a:ext>
               </a:extLst>
             </p:cNvPr>
-            <p:cNvSpPr txBox="1"/>
+            <p:cNvGrpSpPr/>
             <p:nvPr/>
-          </p:nvSpPr>
-          <p:spPr>
+          </p:nvGrpSpPr>
+          <p:grpSpPr>
             <a:xfrm>
-              <a:off x="9091607" y="4022217"/>
-              <a:ext cx="2160287" cy="369332"/>
+              <a:off x="5324130" y="623304"/>
+              <a:ext cx="4513933" cy="4943896"/>
+              <a:chOff x="5324130" y="623304"/>
+              <a:chExt cx="4513933" cy="4943896"/>
+            </a:xfrm>
+          </p:grpSpPr>
+          <p:grpSp>
+            <p:nvGrpSpPr>
+              <p:cNvPr id="60" name="Group 59">
+                <a:extLst>
+                  <a:ext uri="{FF2B5EF4-FFF2-40B4-BE49-F238E27FC236}">
+                    <a16:creationId xmlns:a16="http://schemas.microsoft.com/office/drawing/2014/main" id="{FC96FFCF-2FB3-8B18-191F-2F6760CE8332}"/>
+                  </a:ext>
+                </a:extLst>
+              </p:cNvPr>
+              <p:cNvGrpSpPr/>
+              <p:nvPr/>
+            </p:nvGrpSpPr>
+            <p:grpSpPr>
+              <a:xfrm>
+                <a:off x="5324130" y="623304"/>
+                <a:ext cx="4513933" cy="4943896"/>
+                <a:chOff x="6067702" y="457123"/>
+                <a:chExt cx="4513933" cy="4943896"/>
+              </a:xfrm>
+            </p:grpSpPr>
+            <p:sp>
+              <p:nvSpPr>
+                <p:cNvPr id="7" name="Rectangle 6">
+                  <a:extLst>
+                    <a:ext uri="{FF2B5EF4-FFF2-40B4-BE49-F238E27FC236}">
+                      <a16:creationId xmlns:a16="http://schemas.microsoft.com/office/drawing/2014/main" id="{98FF38A9-3F26-2282-E6F1-342022E21C27}"/>
+                    </a:ext>
+                  </a:extLst>
+                </p:cNvPr>
+                <p:cNvSpPr/>
+                <p:nvPr/>
+              </p:nvSpPr>
+              <p:spPr>
+                <a:xfrm>
+                  <a:off x="6621138" y="3742981"/>
+                  <a:ext cx="3214042" cy="776689"/>
+                </a:xfrm>
+                <a:prstGeom prst="rect">
+                  <a:avLst/>
+                </a:prstGeom>
+                <a:solidFill>
+                  <a:srgbClr val="E3DE00"/>
+                </a:solidFill>
+              </p:spPr>
+              <p:style>
+                <a:lnRef idx="2">
+                  <a:schemeClr val="accent1">
+                    <a:shade val="15000"/>
+                  </a:schemeClr>
+                </a:lnRef>
+                <a:fillRef idx="1">
+                  <a:schemeClr val="accent1"/>
+                </a:fillRef>
+                <a:effectRef idx="0">
+                  <a:schemeClr val="accent1"/>
+                </a:effectRef>
+                <a:fontRef idx="minor">
+                  <a:schemeClr val="lt1"/>
+                </a:fontRef>
+              </p:style>
+              <p:txBody>
+                <a:bodyPr rtlCol="0" anchor="ctr"/>
+                <a:lstStyle/>
+                <a:p>
+                  <a:pPr algn="ctr"/>
+                  <a:endParaRPr lang="en-US"/>
+                </a:p>
+              </p:txBody>
+            </p:sp>
+            <p:sp>
+              <p:nvSpPr>
+                <p:cNvPr id="8" name="Rectangle 7">
+                  <a:extLst>
+                    <a:ext uri="{FF2B5EF4-FFF2-40B4-BE49-F238E27FC236}">
+                      <a16:creationId xmlns:a16="http://schemas.microsoft.com/office/drawing/2014/main" id="{4B884B81-FB45-4483-7A28-84BDBDA7146F}"/>
+                    </a:ext>
+                  </a:extLst>
+                </p:cNvPr>
+                <p:cNvSpPr/>
+                <p:nvPr/>
+              </p:nvSpPr>
+              <p:spPr>
+                <a:xfrm>
+                  <a:off x="6621138" y="4519670"/>
+                  <a:ext cx="3214041" cy="370114"/>
+                </a:xfrm>
+                <a:prstGeom prst="rect">
+                  <a:avLst/>
+                </a:prstGeom>
+              </p:spPr>
+              <p:style>
+                <a:lnRef idx="2">
+                  <a:schemeClr val="accent1">
+                    <a:shade val="15000"/>
+                  </a:schemeClr>
+                </a:lnRef>
+                <a:fillRef idx="1">
+                  <a:schemeClr val="accent1"/>
+                </a:fillRef>
+                <a:effectRef idx="0">
+                  <a:schemeClr val="accent1"/>
+                </a:effectRef>
+                <a:fontRef idx="minor">
+                  <a:schemeClr val="lt1"/>
+                </a:fontRef>
+              </p:style>
+              <p:txBody>
+                <a:bodyPr rtlCol="0" anchor="ctr"/>
+                <a:lstStyle/>
+                <a:p>
+                  <a:pPr algn="ctr"/>
+                  <a:endParaRPr lang="en-US"/>
+                </a:p>
+              </p:txBody>
+            </p:sp>
+            <p:sp>
+              <p:nvSpPr>
+                <p:cNvPr id="9" name="Trapezoid 8">
+                  <a:extLst>
+                    <a:ext uri="{FF2B5EF4-FFF2-40B4-BE49-F238E27FC236}">
+                      <a16:creationId xmlns:a16="http://schemas.microsoft.com/office/drawing/2014/main" id="{3BAE7987-6B19-4D9B-68C5-748E1E37500A}"/>
+                    </a:ext>
+                  </a:extLst>
+                </p:cNvPr>
+                <p:cNvSpPr/>
+                <p:nvPr/>
+              </p:nvSpPr>
+              <p:spPr>
+                <a:xfrm rot="10800000">
+                  <a:off x="6621137" y="4889783"/>
+                  <a:ext cx="3214042" cy="511236"/>
+                </a:xfrm>
+                <a:prstGeom prst="trapezoid">
+                  <a:avLst>
+                    <a:gd name="adj" fmla="val 72409"/>
+                  </a:avLst>
+                </a:prstGeom>
+              </p:spPr>
+              <p:style>
+                <a:lnRef idx="2">
+                  <a:schemeClr val="accent1">
+                    <a:shade val="15000"/>
+                  </a:schemeClr>
+                </a:lnRef>
+                <a:fillRef idx="1">
+                  <a:schemeClr val="accent1"/>
+                </a:fillRef>
+                <a:effectRef idx="0">
+                  <a:schemeClr val="accent1"/>
+                </a:effectRef>
+                <a:fontRef idx="minor">
+                  <a:schemeClr val="lt1"/>
+                </a:fontRef>
+              </p:style>
+              <p:txBody>
+                <a:bodyPr rtlCol="0" anchor="ctr"/>
+                <a:lstStyle/>
+                <a:p>
+                  <a:pPr algn="ctr"/>
+                  <a:endParaRPr lang="en-US"/>
+                </a:p>
+              </p:txBody>
+            </p:sp>
+            <p:cxnSp>
+              <p:nvCxnSpPr>
+                <p:cNvPr id="11" name="Straight Connector 10">
+                  <a:extLst>
+                    <a:ext uri="{FF2B5EF4-FFF2-40B4-BE49-F238E27FC236}">
+                      <a16:creationId xmlns:a16="http://schemas.microsoft.com/office/drawing/2014/main" id="{3AC5E83D-D610-515D-ECAA-7AD2A4F95FD2}"/>
+                    </a:ext>
+                  </a:extLst>
+                </p:cNvPr>
+                <p:cNvCxnSpPr>
+                  <a:cxnSpLocks/>
+                </p:cNvCxnSpPr>
+                <p:nvPr/>
+              </p:nvCxnSpPr>
+              <p:spPr>
+                <a:xfrm>
+                  <a:off x="6191872" y="4278086"/>
+                  <a:ext cx="4389763" cy="0"/>
+                </a:xfrm>
+                <a:prstGeom prst="line">
+                  <a:avLst/>
+                </a:prstGeom>
+                <a:ln w="57150"/>
+              </p:spPr>
+              <p:style>
+                <a:lnRef idx="2">
+                  <a:schemeClr val="accent1"/>
+                </a:lnRef>
+                <a:fillRef idx="0">
+                  <a:schemeClr val="accent1"/>
+                </a:fillRef>
+                <a:effectRef idx="1">
+                  <a:schemeClr val="accent1"/>
+                </a:effectRef>
+                <a:fontRef idx="minor">
+                  <a:schemeClr val="tx1"/>
+                </a:fontRef>
+              </p:style>
+            </p:cxnSp>
+            <p:sp>
+              <p:nvSpPr>
+                <p:cNvPr id="15" name="Rectangle 14">
+                  <a:extLst>
+                    <a:ext uri="{FF2B5EF4-FFF2-40B4-BE49-F238E27FC236}">
+                      <a16:creationId xmlns:a16="http://schemas.microsoft.com/office/drawing/2014/main" id="{C6961707-1466-FFA6-53DF-EF3240D2F8EC}"/>
+                    </a:ext>
+                  </a:extLst>
+                </p:cNvPr>
+                <p:cNvSpPr/>
+                <p:nvPr/>
+              </p:nvSpPr>
+              <p:spPr>
+                <a:xfrm>
+                  <a:off x="7067913" y="457123"/>
+                  <a:ext cx="2394857" cy="2008188"/>
+                </a:xfrm>
+                <a:prstGeom prst="rect">
+                  <a:avLst/>
+                </a:prstGeom>
+                <a:solidFill>
+                  <a:schemeClr val="bg2">
+                    <a:alpha val="80000"/>
+                  </a:schemeClr>
+                </a:solidFill>
+              </p:spPr>
+              <p:style>
+                <a:lnRef idx="2">
+                  <a:schemeClr val="accent1">
+                    <a:shade val="15000"/>
+                  </a:schemeClr>
+                </a:lnRef>
+                <a:fillRef idx="1">
+                  <a:schemeClr val="accent1"/>
+                </a:fillRef>
+                <a:effectRef idx="0">
+                  <a:schemeClr val="accent1"/>
+                </a:effectRef>
+                <a:fontRef idx="minor">
+                  <a:schemeClr val="lt1"/>
+                </a:fontRef>
+              </p:style>
+              <p:txBody>
+                <a:bodyPr rtlCol="0" anchor="ctr"/>
+                <a:lstStyle/>
+                <a:p>
+                  <a:pPr algn="ctr"/>
+                  <a:r>
+                    <a:rPr lang="en-US" dirty="0">
+                      <a:solidFill>
+                        <a:schemeClr val="tx1"/>
+                      </a:solidFill>
+                    </a:rPr>
+                    <a:t>Obstacle</a:t>
+                  </a:r>
+                </a:p>
+              </p:txBody>
+            </p:sp>
+            <p:cxnSp>
+              <p:nvCxnSpPr>
+                <p:cNvPr id="30" name="Straight Connector 29">
+                  <a:extLst>
+                    <a:ext uri="{FF2B5EF4-FFF2-40B4-BE49-F238E27FC236}">
+                      <a16:creationId xmlns:a16="http://schemas.microsoft.com/office/drawing/2014/main" id="{6AC0F82A-266A-697D-242D-BCC4B2F8F658}"/>
+                    </a:ext>
+                  </a:extLst>
+                </p:cNvPr>
+                <p:cNvCxnSpPr>
+                  <a:cxnSpLocks/>
+                </p:cNvCxnSpPr>
+                <p:nvPr/>
+              </p:nvCxnSpPr>
+              <p:spPr>
+                <a:xfrm flipH="1">
+                  <a:off x="7030729" y="3252052"/>
+                  <a:ext cx="636896" cy="484905"/>
+                </a:xfrm>
+                <a:prstGeom prst="line">
+                  <a:avLst/>
+                </a:prstGeom>
+                <a:ln>
+                  <a:solidFill>
+                    <a:schemeClr val="tx1"/>
+                  </a:solidFill>
+                  <a:prstDash val="dash"/>
+                </a:ln>
+              </p:spPr>
+              <p:style>
+                <a:lnRef idx="2">
+                  <a:schemeClr val="accent1"/>
+                </a:lnRef>
+                <a:fillRef idx="0">
+                  <a:schemeClr val="accent1"/>
+                </a:fillRef>
+                <a:effectRef idx="1">
+                  <a:schemeClr val="accent1"/>
+                </a:effectRef>
+                <a:fontRef idx="minor">
+                  <a:schemeClr val="tx1"/>
+                </a:fontRef>
+              </p:style>
+            </p:cxnSp>
+            <p:cxnSp>
+              <p:nvCxnSpPr>
+                <p:cNvPr id="45" name="Straight Connector 44">
+                  <a:extLst>
+                    <a:ext uri="{FF2B5EF4-FFF2-40B4-BE49-F238E27FC236}">
+                      <a16:creationId xmlns:a16="http://schemas.microsoft.com/office/drawing/2014/main" id="{B6AC428F-622B-2AA5-8B8D-75A62A18014B}"/>
+                    </a:ext>
+                  </a:extLst>
+                </p:cNvPr>
+                <p:cNvCxnSpPr>
+                  <a:cxnSpLocks/>
+                </p:cNvCxnSpPr>
+                <p:nvPr/>
+              </p:nvCxnSpPr>
+              <p:spPr>
+                <a:xfrm flipH="1">
+                  <a:off x="7030729" y="3736957"/>
+                  <a:ext cx="703571" cy="0"/>
+                </a:xfrm>
+                <a:prstGeom prst="line">
+                  <a:avLst/>
+                </a:prstGeom>
+                <a:ln>
+                  <a:solidFill>
+                    <a:schemeClr val="tx1"/>
+                  </a:solidFill>
+                  <a:prstDash val="dash"/>
+                </a:ln>
+              </p:spPr>
+              <p:style>
+                <a:lnRef idx="2">
+                  <a:schemeClr val="accent1"/>
+                </a:lnRef>
+                <a:fillRef idx="0">
+                  <a:schemeClr val="accent1"/>
+                </a:fillRef>
+                <a:effectRef idx="1">
+                  <a:schemeClr val="accent1"/>
+                </a:effectRef>
+                <a:fontRef idx="minor">
+                  <a:schemeClr val="tx1"/>
+                </a:fontRef>
+              </p:style>
+            </p:cxnSp>
+            <p:sp>
+              <p:nvSpPr>
+                <p:cNvPr id="48" name="Arc 47">
+                  <a:extLst>
+                    <a:ext uri="{FF2B5EF4-FFF2-40B4-BE49-F238E27FC236}">
+                      <a16:creationId xmlns:a16="http://schemas.microsoft.com/office/drawing/2014/main" id="{166E5A87-2C19-561B-00A4-C1521A8A1DFD}"/>
+                    </a:ext>
+                  </a:extLst>
+                </p:cNvPr>
+                <p:cNvSpPr/>
+                <p:nvPr/>
+              </p:nvSpPr>
+              <p:spPr>
+                <a:xfrm flipV="1">
+                  <a:off x="6067702" y="2909668"/>
+                  <a:ext cx="1551393" cy="1481552"/>
+                </a:xfrm>
+                <a:prstGeom prst="arc">
+                  <a:avLst>
+                    <a:gd name="adj1" fmla="val 21295703"/>
+                    <a:gd name="adj2" fmla="val 1337315"/>
+                  </a:avLst>
+                </a:prstGeom>
+                <a:ln>
+                  <a:solidFill>
+                    <a:schemeClr val="tx1"/>
+                  </a:solidFill>
+                  <a:prstDash val="dash"/>
+                  <a:tailEnd type="triangle"/>
+                </a:ln>
+              </p:spPr>
+              <p:style>
+                <a:lnRef idx="2">
+                  <a:schemeClr val="accent1"/>
+                </a:lnRef>
+                <a:fillRef idx="0">
+                  <a:schemeClr val="accent1"/>
+                </a:fillRef>
+                <a:effectRef idx="1">
+                  <a:schemeClr val="accent1"/>
+                </a:effectRef>
+                <a:fontRef idx="minor">
+                  <a:schemeClr val="tx1"/>
+                </a:fontRef>
+              </p:style>
+              <p:txBody>
+                <a:bodyPr rtlCol="0" anchor="ctr"/>
+                <a:lstStyle/>
+                <a:p>
+                  <a:pPr algn="ctr"/>
+                  <a:endParaRPr lang="en-US"/>
+                </a:p>
+              </p:txBody>
+            </p:sp>
+            <mc:AlternateContent xmlns:mc="http://schemas.openxmlformats.org/markup-compatibility/2006" xmlns:a14="http://schemas.microsoft.com/office/drawing/2010/main">
+              <mc:Choice Requires="a14">
+                <p:sp>
+                  <p:nvSpPr>
+                    <p:cNvPr id="52" name="TextBox 51">
+                      <a:extLst>
+                        <a:ext uri="{FF2B5EF4-FFF2-40B4-BE49-F238E27FC236}">
+                          <a16:creationId xmlns:a16="http://schemas.microsoft.com/office/drawing/2014/main" id="{B5FB2DA0-DE67-D95F-8C82-3633A8144AAD}"/>
+                        </a:ext>
+                      </a:extLst>
+                    </p:cNvPr>
+                    <p:cNvSpPr txBox="1"/>
+                    <p:nvPr/>
+                  </p:nvSpPr>
+                  <p:spPr>
+                    <a:xfrm>
+                      <a:off x="7586398" y="3326156"/>
+                      <a:ext cx="560005" cy="369332"/>
+                    </a:xfrm>
+                    <a:prstGeom prst="rect">
+                      <a:avLst/>
+                    </a:prstGeom>
+                    <a:noFill/>
+                  </p:spPr>
+                  <p:txBody>
+                    <a:bodyPr wrap="square" rtlCol="0">
+                      <a:spAutoFit/>
+                    </a:bodyPr>
+                    <a:lstStyle/>
+                    <a:p>
+                      <a:pPr/>
+                      <a14:m>
+                        <m:oMathPara xmlns:m="http://schemas.openxmlformats.org/officeDocument/2006/math">
+                          <m:oMathParaPr>
+                            <m:jc m:val="centerGroup"/>
+                          </m:oMathParaPr>
+                          <m:oMath xmlns:m="http://schemas.openxmlformats.org/officeDocument/2006/math">
+                            <m:sSub>
+                              <m:sSubPr>
+                                <m:ctrlPr>
+                                  <a:rPr lang="en-US" b="0" i="1" smtClean="0">
+                                    <a:latin typeface="Cambria Math" panose="02040503050406030204" pitchFamily="18" charset="0"/>
+                                  </a:rPr>
+                                </m:ctrlPr>
+                              </m:sSubPr>
+                              <m:e>
+                                <m:r>
+                                  <a:rPr lang="en-US" b="0" i="1" smtClean="0">
+                                    <a:latin typeface="Cambria Math" panose="02040503050406030204" pitchFamily="18" charset="0"/>
+                                  </a:rPr>
+                                  <m:t>𝜃</m:t>
+                                </m:r>
+                              </m:e>
+                              <m:sub>
+                                <m:r>
+                                  <a:rPr lang="en-US" b="0" i="1" smtClean="0">
+                                    <a:latin typeface="Cambria Math" panose="02040503050406030204" pitchFamily="18" charset="0"/>
+                                  </a:rPr>
+                                  <m:t>𝑇</m:t>
+                                </m:r>
+                                <m:r>
+                                  <a:rPr lang="en-US" b="0" i="1" smtClean="0">
+                                    <a:latin typeface="Cambria Math" panose="02040503050406030204" pitchFamily="18" charset="0"/>
+                                  </a:rPr>
+                                  <m:t>0</m:t>
+                                </m:r>
+                              </m:sub>
+                            </m:sSub>
+                          </m:oMath>
+                        </m:oMathPara>
+                      </a14:m>
+                      <a:endParaRPr lang="en-US" dirty="0"/>
+                    </a:p>
+                  </p:txBody>
+                </p:sp>
+              </mc:Choice>
+              <mc:Fallback xmlns="">
+                <p:sp>
+                  <p:nvSpPr>
+                    <p:cNvPr id="52" name="TextBox 51">
+                      <a:extLst>
+                        <a:ext uri="{FF2B5EF4-FFF2-40B4-BE49-F238E27FC236}">
+                          <a16:creationId xmlns:a16="http://schemas.microsoft.com/office/drawing/2014/main" id="{B5FB2DA0-DE67-D95F-8C82-3633A8144AAD}"/>
+                        </a:ext>
+                      </a:extLst>
+                    </p:cNvPr>
+                    <p:cNvSpPr txBox="1">
+                      <a:spLocks noRot="1" noChangeAspect="1" noMove="1" noResize="1" noEditPoints="1" noAdjustHandles="1" noChangeArrowheads="1" noChangeShapeType="1" noTextEdit="1"/>
+                    </p:cNvSpPr>
+                    <p:nvPr/>
+                  </p:nvSpPr>
+                  <p:spPr>
+                    <a:xfrm>
+                      <a:off x="7586398" y="3326156"/>
+                      <a:ext cx="560005" cy="369332"/>
+                    </a:xfrm>
+                    <a:prstGeom prst="rect">
+                      <a:avLst/>
+                    </a:prstGeom>
+                    <a:blipFill>
+                      <a:blip r:embed="rId5"/>
+                      <a:stretch>
+                        <a:fillRect/>
+                      </a:stretch>
+                    </a:blipFill>
+                  </p:spPr>
+                  <p:txBody>
+                    <a:bodyPr/>
+                    <a:lstStyle/>
+                    <a:p>
+                      <a:r>
+                        <a:rPr lang="en-US">
+                          <a:noFill/>
+                        </a:rPr>
+                        <a:t> </a:t>
+                      </a:r>
+                    </a:p>
+                  </p:txBody>
+                </p:sp>
+              </mc:Fallback>
+            </mc:AlternateContent>
+          </p:grpSp>
+          <p:sp>
+            <p:nvSpPr>
+              <p:cNvPr id="61" name="TextBox 60">
+                <a:extLst>
+                  <a:ext uri="{FF2B5EF4-FFF2-40B4-BE49-F238E27FC236}">
+                    <a16:creationId xmlns:a16="http://schemas.microsoft.com/office/drawing/2014/main" id="{0BE245F1-48B7-7DF8-547B-CF3B3E963A9C}"/>
+                  </a:ext>
+                </a:extLst>
+              </p:cNvPr>
+              <p:cNvSpPr txBox="1"/>
+              <p:nvPr/>
+            </p:nvSpPr>
+            <p:spPr>
+              <a:xfrm>
+                <a:off x="9091607" y="4121323"/>
+                <a:ext cx="746456" cy="369332"/>
+              </a:xfrm>
+              <a:prstGeom prst="rect">
+                <a:avLst/>
+              </a:prstGeom>
+              <a:noFill/>
+            </p:spPr>
+            <p:txBody>
+              <a:bodyPr wrap="square" rtlCol="0">
+                <a:spAutoFit/>
+              </a:bodyPr>
+              <a:lstStyle/>
+              <a:p>
+                <a:r>
+                  <a:rPr lang="en-US" dirty="0"/>
+                  <a:t>SWL</a:t>
+                </a:r>
+              </a:p>
+            </p:txBody>
+          </p:sp>
+        </p:grpSp>
+        <p:pic>
+          <p:nvPicPr>
+            <p:cNvPr id="4" name="Picture 2" descr="Crystalline Silicon Photovoltaics Research | Department of Energy">
+              <a:extLst>
+                <a:ext uri="{FF2B5EF4-FFF2-40B4-BE49-F238E27FC236}">
+                  <a16:creationId xmlns:a16="http://schemas.microsoft.com/office/drawing/2014/main" id="{ECAFB887-109A-8167-CA34-4DD00CC874EA}"/>
+                </a:ext>
+              </a:extLst>
+            </p:cNvPr>
+            <p:cNvPicPr>
+              <a:picLocks noChangeAspect="1" noChangeArrowheads="1"/>
+            </p:cNvPicPr>
+            <p:nvPr/>
+          </p:nvPicPr>
+          <p:blipFill rotWithShape="1">
+            <a:blip r:embed="rId3">
+              <a:extLst>
+                <a:ext uri="{28A0092B-C50C-407E-A947-70E740481C1C}">
+                  <a14:useLocalDpi xmlns:a14="http://schemas.microsoft.com/office/drawing/2010/main" val="0"/>
+                </a:ext>
+              </a:extLst>
+            </a:blip>
+            <a:srcRect l="4228" t="10079" r="3054" b="8752"/>
+            <a:stretch>
+              <a:fillRect/>
+            </a:stretch>
+          </p:blipFill>
+          <p:spPr bwMode="auto">
+            <a:xfrm rot="3091500">
+              <a:off x="6257279" y="3204963"/>
+              <a:ext cx="326259" cy="753700"/>
             </a:xfrm>
             <a:prstGeom prst="rect">
               <a:avLst/>
             </a:prstGeom>
             <a:noFill/>
+            <a:extLst>
+              <a:ext uri="{909E8E84-426E-40DD-AFC4-6F175D3DCCD1}">
+                <a14:hiddenFill xmlns:a14="http://schemas.microsoft.com/office/drawing/2010/main">
+                  <a:solidFill>
+                    <a:srgbClr val="FFFFFF"/>
+                  </a:solidFill>
+                </a14:hiddenFill>
+              </a:ext>
+            </a:extLst>
           </p:spPr>
-          <p:txBody>
-            <a:bodyPr wrap="square" rtlCol="0">
-              <a:spAutoFit/>
-            </a:bodyPr>
-            <a:lstStyle/>
-            <a:p>
-              <a:r>
-                <a:rPr lang="en-US" dirty="0"/>
-                <a:t>still water line</a:t>
-              </a:r>
-            </a:p>
-          </p:txBody>
-        </p:sp>
+        </p:pic>
       </p:grpSp>
     </p:spTree>
     <p:extLst>
